--- a/cover-proposals/v9_1006_shinohara/台割案2_P02-11_編集用.pptx
+++ b/cover-proposals/v9_1006_shinohara/台割案2_P02-11_編集用.pptx
@@ -6529,7 +6529,7 @@
         <p:spPr>
           <a:xfrm>
             <a:off x="8169668" y="4565358"/>
-            <a:ext cx="5541684" cy="796892"/>
+            <a:ext cx="4048425" cy="796892"/>
           </a:xfrm>
           <a:prstGeom prst="rect">
             <a:avLst/>
@@ -6556,7 +6556,7 @@
                 <a:ea typeface="Noto Sans ExtraLight" pitchFamily="34" charset="-122"/>
                 <a:cs typeface="Noto Sans ExtraLight" pitchFamily="34" charset="-120"/>
               </a:rPr>
-              <a:t>The world's largest</a:t>
+              <a:t>The partner the copper</a:t>
             </a:r>
             <a:endParaRPr lang="en-US" sz="2800" dirty="0"/>
           </a:p>
@@ -6576,7 +6576,7 @@
                 <a:ea typeface="Noto Sans ExtraLight" pitchFamily="34" charset="-122"/>
                 <a:cs typeface="Noto Sans ExtraLight" pitchFamily="34" charset="-120"/>
               </a:rPr>
-              <a:t>non-operating copper producer.</a:t>
+              <a:t>industry calls first.</a:t>
             </a:r>
             <a:endParaRPr lang="en-US" sz="2800" dirty="0"/>
           </a:p>
